--- a/out/PPTAgent_2501.03936.pptx
+++ b/out/PPTAgent_2501.03936.pptx
@@ -4358,7 +4358,7 @@
         <p:spPr>
           <a:xfrm>
             <a:off x="868680" y="1600200"/>
-            <a:ext cx="10424160" cy="4114800"/>
+            <a:ext cx="4754880" cy="3840480"/>
           </a:xfrm>
           <a:prstGeom prst="rect">
             <a:avLst/>
@@ -4512,9 +4512,118 @@
           </a:p>
         </p:txBody>
       </p:sp>
-      <p:sp>
-        <p:nvSpPr>
-          <p:cNvPr id="5" name="TextBox 4"/>
+      <p:pic>
+        <p:nvPicPr>
+          <p:cNvPr id="5" name="Picture 4" descr="p02_01_figure.png"/>
+          <p:cNvPicPr>
+            <a:picLocks noChangeAspect="1"/>
+          </p:cNvPicPr>
+          <p:nvPr/>
+        </p:nvPicPr>
+        <p:blipFill>
+          <a:blip r:embed="rId2"/>
+          <a:stretch>
+            <a:fillRect/>
+          </a:stretch>
+        </p:blipFill>
+        <p:spPr>
+          <a:xfrm>
+            <a:off x="5897880" y="2063873"/>
+            <a:ext cx="5486400" cy="2766829"/>
+          </a:xfrm>
+          <a:prstGeom prst="rect">
+            <a:avLst/>
+          </a:prstGeom>
+        </p:spPr>
+      </p:pic>
+      <p:sp>
+        <p:nvSpPr>
+          <p:cNvPr id="6" name="Rectangle 5"/>
+          <p:cNvSpPr/>
+          <p:nvPr/>
+        </p:nvSpPr>
+        <p:spPr>
+          <a:xfrm>
+            <a:off x="5897880" y="5504688"/>
+            <a:ext cx="5486400" cy="841248"/>
+          </a:xfrm>
+          <a:prstGeom prst="rect">
+            <a:avLst/>
+          </a:prstGeom>
+          <a:solidFill>
+            <a:srgbClr val="F4F6F8"/>
+          </a:solidFill>
+          <a:ln>
+            <a:noFill/>
+          </a:ln>
+        </p:spPr>
+        <p:style>
+          <a:lnRef idx="1">
+            <a:schemeClr val="accent1"/>
+          </a:lnRef>
+          <a:fillRef idx="3">
+            <a:schemeClr val="accent1"/>
+          </a:fillRef>
+          <a:effectRef idx="2">
+            <a:schemeClr val="accent1"/>
+          </a:effectRef>
+          <a:fontRef idx="minor">
+            <a:schemeClr val="lt1"/>
+          </a:fontRef>
+        </p:style>
+        <p:txBody>
+          <a:bodyPr rtlCol="0" anchor="ctr"/>
+          <a:lstStyle/>
+          <a:p>
+            <a:pPr algn="ctr"/>
+          </a:p>
+        </p:txBody>
+      </p:sp>
+      <p:sp>
+        <p:nvSpPr>
+          <p:cNvPr id="7" name="TextBox 6"/>
+          <p:cNvSpPr txBox="1"/>
+          <p:nvPr/>
+        </p:nvSpPr>
+        <p:spPr>
+          <a:xfrm>
+            <a:off x="6053328" y="5596128"/>
+            <a:ext cx="5212080" cy="658368"/>
+          </a:xfrm>
+          <a:prstGeom prst="rect">
+            <a:avLst/>
+          </a:prstGeom>
+          <a:noFill/>
+        </p:spPr>
+        <p:txBody>
+          <a:bodyPr wrap="square" anchor="t" lIns="0" rIns="0" tIns="0" bIns="0">
+            <a:spAutoFit/>
+          </a:bodyPr>
+          <a:lstStyle/>
+          <a:p>
+            <a:pPr algn="l">
+              <a:lnSpc>
+                <a:spcPct val="115000"/>
+              </a:lnSpc>
+              <a:spcBef>
+                <a:spcPts val="0"/>
+              </a:spcBef>
+            </a:pPr>
+            <a:r>
+              <a:rPr sz="950" b="0">
+                <a:solidFill>
+                  <a:srgbClr val="5A6B7C"/>
+                </a:solidFill>
+                <a:latin typeface="Helvetica Neue"/>
+              </a:rPr>
+              <a:t>Figure 2: Overview of the PPTAGENT workflow. StageI: Presentation Analysis involves analyzing the input presentation to cluster slides into groups and extract their content schemas. Stage II: Presentation Generation gene</a:t>
+            </a:r>
+          </a:p>
+        </p:txBody>
+      </p:sp>
+      <p:sp>
+        <p:nvSpPr>
+          <p:cNvPr id="8" name="TextBox 7"/>
           <p:cNvSpPr txBox="1"/>
           <p:nvPr/>
         </p:nvSpPr>
@@ -5002,7 +5111,7 @@
         <p:spPr>
           <a:xfrm>
             <a:off x="868680" y="1600200"/>
-            <a:ext cx="10424160" cy="4114800"/>
+            <a:ext cx="4754880" cy="3840480"/>
           </a:xfrm>
           <a:prstGeom prst="rect">
             <a:avLst/>
@@ -5184,16 +5293,40 @@
           </a:p>
         </p:txBody>
       </p:sp>
-      <p:sp>
-        <p:nvSpPr>
-          <p:cNvPr id="5" name="Rectangle 4"/>
+      <p:pic>
+        <p:nvPicPr>
+          <p:cNvPr id="5" name="Picture 4" descr="p04_01_figure.png"/>
+          <p:cNvPicPr>
+            <a:picLocks noChangeAspect="1"/>
+          </p:cNvPicPr>
+          <p:nvPr/>
+        </p:nvPicPr>
+        <p:blipFill>
+          <a:blip r:embed="rId2"/>
+          <a:stretch>
+            <a:fillRect/>
+          </a:stretch>
+        </p:blipFill>
+        <p:spPr>
+          <a:xfrm>
+            <a:off x="5897880" y="2036123"/>
+            <a:ext cx="5486399" cy="2822330"/>
+          </a:xfrm>
+          <a:prstGeom prst="rect">
+            <a:avLst/>
+          </a:prstGeom>
+        </p:spPr>
+      </p:pic>
+      <p:sp>
+        <p:nvSpPr>
+          <p:cNvPr id="6" name="Rectangle 5"/>
           <p:cNvSpPr/>
           <p:nvPr/>
         </p:nvSpPr>
         <p:spPr>
           <a:xfrm>
-            <a:off x="868680" y="5623560"/>
-            <a:ext cx="10424160" cy="685800"/>
+            <a:off x="5897880" y="5504688"/>
+            <a:ext cx="5486400" cy="841248"/>
           </a:xfrm>
           <a:prstGeom prst="rect">
             <a:avLst/>
@@ -5229,14 +5362,14 @@
       </p:sp>
       <p:sp>
         <p:nvSpPr>
-          <p:cNvPr id="6" name="TextBox 5"/>
+          <p:cNvPr id="7" name="TextBox 6"/>
           <p:cNvSpPr txBox="1"/>
           <p:nvPr/>
         </p:nvSpPr>
         <p:spPr>
           <a:xfrm>
-            <a:off x="1051560" y="5742432"/>
-            <a:ext cx="10058400" cy="457200"/>
+            <a:off x="6053328" y="5596128"/>
+            <a:ext cx="5212080" cy="658368"/>
           </a:xfrm>
           <a:prstGeom prst="rect">
             <a:avLst/>
@@ -5251,27 +5384,27 @@
           <a:p>
             <a:pPr algn="l">
               <a:lnSpc>
-                <a:spcPct val="120000"/>
+                <a:spcPct val="115000"/>
               </a:lnSpc>
               <a:spcBef>
                 <a:spcPts val="0"/>
               </a:spcBef>
             </a:pPr>
             <a:r>
-              <a:rPr sz="1100" b="0">
+              <a:rPr sz="950" b="0">
                 <a:solidFill>
                   <a:srgbClr val="5A6B7C"/>
                 </a:solidFill>
                 <a:latin typeface="Helvetica Neue"/>
               </a:rPr>
-              <a:t>Figure 1: Comparison between our PPTAGENT ap-</a:t>
-            </a:r>
-          </a:p>
-        </p:txBody>
-      </p:sp>
-      <p:sp>
-        <p:nvSpPr>
-          <p:cNvPr id="7" name="TextBox 6"/>
+              <a:t>Figure 3: PPTEVAL assesses presentations from three dimensions: content, design, and coherence.</a:t>
+            </a:r>
+          </a:p>
+        </p:txBody>
+      </p:sp>
+      <p:sp>
+        <p:nvSpPr>
+          <p:cNvPr id="8" name="TextBox 7"/>
           <p:cNvSpPr txBox="1"/>
           <p:nvPr/>
         </p:nvSpPr>

--- a/out/PPTAgent_2501.03936.pptx
+++ b/out/PPTAgent_2501.03936.pptx
@@ -790,7 +790,7 @@
           <a:lstStyle/>
           <a:p>
             <a:r>
-              <a:t>This slide covers experiment. Open with: All open-source LLMs are deployed us-ing the VLLM framework on NVIDIA A100 GPUs. Then move to: Each configuration generates 50 presentations (5 domains × 10 input documents), as they do .... Target roughly 90 seconds here.</a:t>
+              <a:t>This slide covers experiment. Open with: All open-source LLMs are deployed using the VLLM framework on NVIDIA A100 GPUs. Then move to: Each configuration generates 50 presentations (5 domains × 10 input documents), as they do .... Target roughly 90 seconds here.</a:t>
             </a:r>
           </a:p>
         </p:txBody>
@@ -1000,7 +1000,7 @@
           <a:lstStyle/>
           <a:p>
             <a:r>
-              <a:t>This slide covers conclusion. Open with: Our ex-periments across data from multiple domains have demonstrated the superiority of our method. Then move to: Moreover, we propose PPTEVAL to provide quantitative metrics for assessing presentation quality. Target roughly 90 seconds here.</a:t>
+              <a:t>This slide covers conclusion. Open with: Our experiments across data from multiple domains have demonstrated the superiority of our method. Then move to: Moreover, we propose PPTEVAL to provide quantitative metrics for assessing presentation quality. Target roughly 90 seconds here.</a:t>
             </a:r>
           </a:p>
         </p:txBody>
@@ -4479,7 +4479,7 @@
                 </a:solidFill>
                 <a:latin typeface="Helvetica Neue"/>
               </a:rPr>
-              <a:t>PPTAGENT first analyzes reference presentations to ex-tract slide-level functional types and content schemas, then ...</a:t>
+              <a:t>PPTAGENT first analyzes reference presentations to extract slide-level functional types and content schemas, then ...</a:t>
             </a:r>
           </a:p>
           <a:p>
@@ -4616,7 +4616,7 @@
                 </a:solidFill>
                 <a:latin typeface="Helvetica Neue"/>
               </a:rPr>
-              <a:t>Figure 2: Overview of the PPTAGENT workflow. StageI: Presentation Analysis involves analyzing the input presentation to cluster slides into groups and extract their content schemas. Stage II: Presentation Generation gene</a:t>
+              <a:t>Figure 2: Overview of the PPTAGENT workflow. StageI: Presentation Analysis involves analyzing the input presentation to cluster slides into groups and extract their content schemas. Stage II: Presentation ...</a:t>
             </a:r>
           </a:p>
         </p:txBody>
@@ -4952,7 +4952,7 @@
                 </a:solidFill>
                 <a:latin typeface="Helvetica Neue"/>
               </a:rPr>
-              <a:t>Re-sults demonstrate that PPTAGENT generates high-quality presentations, achieving an average score of 3.67 for ...</a:t>
+              <a:t>Results demonstrate that PPTAGENT generates high-quality presentations, achieving an average score of 3.67 for ...</a:t>
             </a:r>
           </a:p>
         </p:txBody>
@@ -5593,7 +5593,7 @@
                 </a:solidFill>
                 <a:latin typeface="Helvetica Neue"/>
               </a:rPr>
-              <a:t>All open-source LLMs are deployed us-ing the VLLM framework on NVIDIA A100 GPUs</a:t>
+              <a:t>All open-source LLMs are deployed using the VLLM framework on NVIDIA A100 GPUs</a:t>
             </a:r>
           </a:p>
           <a:p>
@@ -6601,7 +6601,7 @@
                 </a:solidFill>
                 <a:latin typeface="Helvetica Neue"/>
               </a:rPr>
-              <a:t>Our ex-periments across data from multiple domains have demonstrated the superiority of our method</a:t>
+              <a:t>Our experiments across data from multiple domains have demonstrated the superiority of our method</a:t>
             </a:r>
           </a:p>
           <a:p>

--- a/out/PPTAgent_2501.03936.pptx
+++ b/out/PPTAgent_2501.03936.pptx
@@ -650,7 +650,7 @@
           <a:lstStyle/>
           <a:p>
             <a:r>
-              <a:t>This slide covers introduction. Open with: Slide Clustering Bullets: few bullet points Opening: title and icon Display: landscape painting 2. Then move to: Specifically, the generated editing actions are executed within a REPL1 environment. Target roughly 90 seconds here.</a:t>
+              <a:t>This slide covers introduction. Open with: An overview of our workflow is illustrated in Figure 2. Then move to: As shown in Figure 2, we first analyze and cluster reference slides into categories .... Target roughly 90 seconds here.</a:t>
             </a:r>
           </a:p>
         </p:txBody>
@@ -720,7 +720,7 @@
           <a:lstStyle/>
           <a:p>
             <a:r>
-              <a:t>This slide covers evaluation target. Open with: Table 1: The scoring criteria of dimensions in PPTE- VAL, all evaluated in 1-5 .... Then move to: The complete evaluation process is illustrated in Figure 3, with detailed scoring criteria and .... Target roughly 90 seconds here.</a:t>
+              <a:t>This slide covers data. Open with: Specifically, the generated editing actions are executed within a REPL1 environment. Then move to: Outline Generation As shown in Figure 2, we utilize LLM to generate a structured .... Target roughly 90 seconds here.</a:t>
             </a:r>
           </a:p>
         </p:txBody>
@@ -790,7 +790,7 @@
           <a:lstStyle/>
           <a:p>
             <a:r>
-              <a:t>This slide covers experiment. Open with: All open-source LLMs are deployed using the VLLM framework on NVIDIA A100 GPUs. Then move to: Each configuration generates 50 presentations (5 domains × 10 input documents), as they do .... Target roughly 90 seconds here.</a:t>
+              <a:t>This slide covers dataset. Open with: We have curated 10,448 presentations from this source and made them publicly available to .... Then move to: The sampling criteria and preprocessing details are provided in Appendix A, while the dataset .... Target roughly 90 seconds here.</a:t>
             </a:r>
           </a:p>
         </p:txBody>
@@ -860,7 +860,7 @@
           <a:lstStyle/>
           <a:p>
             <a:r>
-              <a:t>This slide covers evaluation metrics. Open with: Further agreement evaluation is shown in Section 5.5. Then move to: Using Llama-3-8B , we calculate the average perplexity across all slides in a presentation. Target roughly 90 seconds here.</a:t>
+              <a:t>This slide covers implementation details. Open with: PPTAGENT is implemented with three models: GPT-4o-2024-08-06 (GPT-4o), Qwen2.5-72B- Instruct , and Qwen2- VL-72B-Instruct. Then move to: All open-source LLMs are deployed using the VLLM framework on NVIDIA A100 GPUs. Target roughly 90 seconds here.</a:t>
             </a:r>
           </a:p>
         </p:txBody>
@@ -930,7 +930,7 @@
           <a:lstStyle/>
           <a:p>
             <a:r>
-              <a:t>This slide covers analysis. Open with: PPTAgent (a) DocPres KCTV PPTAgent (b) Figure 5: Comparative analysis of presentation generation across .... Then move to: Although GPT-4o exhibits superior self-correction capabilities compared to Qwen2.5, Qwen2.5 encounters fewer errors in .... Target roughly 90 seconds here.</a:t>
+              <a:t>This slide covers evaluation metrics. Open with: Further agreement evaluation is shown in Section 5.5. Then move to: Using Llama-3-8B , we calculate the average perplexity across all slides in a presentation. Target roughly 90 seconds here.</a:t>
             </a:r>
           </a:p>
         </p:txBody>
@@ -1000,7 +1000,7 @@
           <a:lstStyle/>
           <a:p>
             <a:r>
-              <a:t>This slide covers conclusion. Open with: Our experiments across data from multiple domains have demonstrated the superiority of our method. Then move to: Moreover, we propose PPTEVAL to provide quantitative metrics for assessing presentation quality. Target roughly 90 seconds here.</a:t>
+              <a:t>This slide covers analysis. Open with: Table 5 shows the correlation of ratings between humans and LLMs. Then move to: Pearson 0.70 0.90 0.55 0.71 Spearman 0.73 0.88 0.57 0.74 tions, leading to outputs .... Target roughly 90 seconds here.</a:t>
             </a:r>
           </a:p>
         </p:txBody>
@@ -1070,7 +1070,7 @@
           <a:lstStyle/>
           <a:p>
             <a:r>
-              <a:t>This slide covers limitations. Open with: While PPTAGENT demonstrates promising capabilities in presentation generation, several limitations remain. Then move to: First, despite achieving a high success rate (&gt;95%) on our dataset, the model occasionally .... Target roughly 90 seconds here.</a:t>
+              <a:t>This slide covers conclusion. Open with: Our experiments across data from multiple domains have demonstrated the superiority of our method. Then move to: Moreover, we propose PPTEVAL to provide quantitative metrics for assessing presentation quality. Target roughly 90 seconds here.</a:t>
             </a:r>
           </a:p>
         </p:txBody>
@@ -4797,7 +4797,7 @@
               </a:spcBef>
             </a:pPr>
             <a:r>
-              <a:rPr sz="1700" b="1">
+              <a:rPr sz="1500" b="1">
                 <a:solidFill>
                   <a:srgbClr val="C08A2E"/>
                 </a:solidFill>
@@ -4806,13 +4806,13 @@
               <a:t>-  </a:t>
             </a:r>
             <a:r>
-              <a:rPr sz="1700">
+              <a:rPr sz="1500">
                 <a:solidFill>
                   <a:srgbClr val="10233A"/>
                 </a:solidFill>
                 <a:latin typeface="Helvetica Neue"/>
               </a:rPr>
-              <a:t>Slide Clustering Bullets: few bullet points Opening: title and icon Display: landscape painting 2</a:t>
+              <a:t>An overview of our workflow is illustrated in Figure 2</a:t>
             </a:r>
           </a:p>
           <a:p>
@@ -4825,7 +4825,7 @@
               </a:spcBef>
             </a:pPr>
             <a:r>
-              <a:rPr sz="1700" b="1">
+              <a:rPr sz="1500" b="1">
                 <a:solidFill>
                   <a:srgbClr val="C08A2E"/>
                 </a:solidFill>
@@ -4834,13 +4834,13 @@
               <a:t>-  </a:t>
             </a:r>
             <a:r>
-              <a:rPr sz="1700">
+              <a:rPr sz="1500">
                 <a:solidFill>
                   <a:srgbClr val="10233A"/>
                 </a:solidFill>
                 <a:latin typeface="Helvetica Neue"/>
               </a:rPr>
-              <a:t>Specifically, the generated editing actions are executed within a REPL1 environment</a:t>
+              <a:t>As shown in Figure 2, we first analyze and cluster reference slides into categories ...</a:t>
             </a:r>
           </a:p>
           <a:p>
@@ -4853,7 +4853,7 @@
               </a:spcBef>
             </a:pPr>
             <a:r>
-              <a:rPr sz="1700" b="1">
+              <a:rPr sz="1500" b="1">
                 <a:solidFill>
                   <a:srgbClr val="C08A2E"/>
                 </a:solidFill>
@@ -4862,13 +4862,13 @@
               <a:t>-  </a:t>
             </a:r>
             <a:r>
-              <a:rPr sz="1700">
+              <a:rPr sz="1500">
                 <a:solidFill>
                   <a:srgbClr val="10233A"/>
                 </a:solidFill>
                 <a:latin typeface="Helvetica Neue"/>
               </a:rPr>
-              <a:t>An overview of our workflow is illustrated in Figure 2</a:t>
+              <a:t>Results demonstrate that PPTAGENT generates high-quality presentations, achieving an average score of 3.67 for ...</a:t>
             </a:r>
           </a:p>
           <a:p>
@@ -4881,7 +4881,7 @@
               </a:spcBef>
             </a:pPr>
             <a:r>
-              <a:rPr sz="1700" b="1">
+              <a:rPr sz="1500" b="1">
                 <a:solidFill>
                   <a:srgbClr val="C08A2E"/>
                 </a:solidFill>
@@ -4890,13 +4890,13 @@
               <a:t>-  </a:t>
             </a:r>
             <a:r>
-              <a:rPr sz="1700">
+              <a:rPr sz="1500">
                 <a:solidFill>
                   <a:srgbClr val="10233A"/>
                 </a:solidFill>
                 <a:latin typeface="Helvetica Neue"/>
               </a:rPr>
-              <a:t>Outline Generation Stage Ⅰ: Presentation Analysis Reference Presentation 1</a:t>
+              <a:t>The conventional method for creating each slide S is formalized in Equation 1</a:t>
             </a:r>
           </a:p>
           <a:p>
@@ -4909,7 +4909,7 @@
               </a:spcBef>
             </a:pPr>
             <a:r>
-              <a:rPr sz="1700" b="1">
+              <a:rPr sz="1500" b="1">
                 <a:solidFill>
                   <a:srgbClr val="C08A2E"/>
                 </a:solidFill>
@@ -4918,13 +4918,13 @@
               <a:t>-  </a:t>
             </a:r>
             <a:r>
-              <a:rPr sz="1700">
+              <a:rPr sz="1500">
                 <a:solidFill>
                   <a:srgbClr val="10233A"/>
                 </a:solidFill>
                 <a:latin typeface="Helvetica Neue"/>
               </a:rPr>
-              <a:t>As shown in Figure 2, we first analyze and cluster reference slides into categories ...</a:t>
+              <a:t>However, creating high-quality presentations requires a captivating storyline, well-designed layouts, and rich, compelling content</a:t>
             </a:r>
           </a:p>
           <a:p>
@@ -4937,7 +4937,7 @@
               </a:spcBef>
             </a:pPr>
             <a:r>
-              <a:rPr sz="1700" b="1">
+              <a:rPr sz="1500" b="1">
                 <a:solidFill>
                   <a:srgbClr val="C08A2E"/>
                 </a:solidFill>
@@ -4946,13 +4946,13 @@
               <a:t>-  </a:t>
             </a:r>
             <a:r>
-              <a:rPr sz="1700">
+              <a:rPr sz="1500">
                 <a:solidFill>
                   <a:srgbClr val="10233A"/>
                 </a:solidFill>
                 <a:latin typeface="Helvetica Neue"/>
               </a:rPr>
-              <a:t>Results demonstrate that PPTAGENT generates high-quality presentations, achieving an average score of 3.67 for ...</a:t>
+              <a:t>However, achieving such an edit-based approach for presentation generation is challenging</a:t>
             </a:r>
           </a:p>
         </p:txBody>
@@ -5054,7 +5054,7 @@
                 </a:solidFill>
                 <a:latin typeface="Helvetica Neue"/>
               </a:rPr>
-              <a:t>Evaluation Target</a:t>
+              <a:t>Data</a:t>
             </a:r>
           </a:p>
         </p:txBody>
@@ -5111,7 +5111,7 @@
         <p:spPr>
           <a:xfrm>
             <a:off x="868680" y="1600200"/>
-            <a:ext cx="4754880" cy="3840480"/>
+            <a:ext cx="10424160" cy="4114800"/>
           </a:xfrm>
           <a:prstGeom prst="rect">
             <a:avLst/>
@@ -5148,7 +5148,7 @@
                 </a:solidFill>
                 <a:latin typeface="Helvetica Neue"/>
               </a:rPr>
-              <a:t>Table 1: The scoring criteria of dimensions in PPTE- VAL, all evaluated in 1-5 ...</a:t>
+              <a:t>Specifically, the generated editing actions are executed within a REPL1 environment</a:t>
             </a:r>
           </a:p>
           <a:p>
@@ -5176,7 +5176,7 @@
                 </a:solidFill>
                 <a:latin typeface="Helvetica Neue"/>
               </a:rPr>
-              <a:t>The complete evaluation process is illustrated in Figure 3, with detailed scoring criteria and ...</a:t>
+              <a:t>Outline Generation As shown in Figure 2, we utilize LLM to generate a structured ...</a:t>
             </a:r>
           </a:p>
           <a:p>
@@ -5204,7 +5204,7 @@
                 </a:solidFill>
                 <a:latin typeface="Helvetica Neue"/>
               </a:rPr>
-              <a:t>Dimension Criteria Content Text should be concise and grammatically sound, supported by relevant images</a:t>
+              <a:t>When actions fail to apply to reference slides, the REPL provides execution feedback2 to ...</a:t>
             </a:r>
           </a:p>
           <a:p>
@@ -5232,7 +5232,7 @@
                 </a:solidFill>
                 <a:latin typeface="Helvetica Neue"/>
               </a:rPr>
-              <a:t>Design Harmonious colors and proper layout ensure readability, while visual elements like geometric shapes ...</a:t>
+              <a:t>Grounded in established presentation design principles , our evaluation framework focuses on three key ...</a:t>
             </a:r>
           </a:p>
           <a:p>
@@ -5260,7 +5260,7 @@
                 </a:solidFill>
                 <a:latin typeface="Helvetica Neue"/>
               </a:rPr>
-              <a:t>Coherence Structure develops progressively, incorporating essential background information</a:t>
+              <a:t>The framework provides both numeric scores (1-to-5 scale) and detailed rationales to justify each ...</a:t>
             </a:r>
           </a:p>
           <a:p>
@@ -5288,7 +5288,343 @@
                 </a:solidFill>
                 <a:latin typeface="Helvetica Neue"/>
               </a:rPr>
-              <a:t>Coherence: 4 Minor flaws presented in the logical structure Logical Structure Slide-1: Describe xx ...</a:t>
+              <a:t>Furthermore, to enhance robustness during the editing process, we implement a self-correction mechanism</a:t>
+            </a:r>
+          </a:p>
+        </p:txBody>
+      </p:sp>
+      <p:sp>
+        <p:nvSpPr>
+          <p:cNvPr id="5" name="TextBox 4"/>
+          <p:cNvSpPr txBox="1"/>
+          <p:nvPr/>
+        </p:nvSpPr>
+        <p:spPr>
+          <a:xfrm>
+            <a:off x="10881360" y="6446520"/>
+            <a:ext cx="548640" cy="274320"/>
+          </a:xfrm>
+          <a:prstGeom prst="rect">
+            <a:avLst/>
+          </a:prstGeom>
+          <a:noFill/>
+        </p:spPr>
+        <p:txBody>
+          <a:bodyPr wrap="square" anchor="t" lIns="0" rIns="0" tIns="0" bIns="0">
+            <a:spAutoFit/>
+          </a:bodyPr>
+          <a:lstStyle/>
+          <a:p>
+            <a:pPr algn="r">
+              <a:lnSpc>
+                <a:spcPct val="120000"/>
+              </a:lnSpc>
+              <a:spcBef>
+                <a:spcPts val="0"/>
+              </a:spcBef>
+            </a:pPr>
+            <a:r>
+              <a:rPr sz="900" b="0">
+                <a:solidFill>
+                  <a:srgbClr val="5A6B7C"/>
+                </a:solidFill>
+                <a:latin typeface="Helvetica Neue"/>
+              </a:rPr>
+              <a:t>04</a:t>
+            </a:r>
+          </a:p>
+        </p:txBody>
+      </p:sp>
+    </p:spTree>
+  </p:cSld>
+  <p:clrMapOvr>
+    <a:masterClrMapping/>
+  </p:clrMapOvr>
+</p:sld>
+</file>
+
+<file path=ppt/slides/slide5.xml><?xml version="1.0" encoding="utf-8"?>
+<p:sld xmlns:a="http://schemas.openxmlformats.org/drawingml/2006/main" xmlns:p="http://schemas.openxmlformats.org/presentationml/2006/main" xmlns:r="http://schemas.openxmlformats.org/officeDocument/2006/relationships">
+  <p:cSld>
+    <p:spTree>
+      <p:nvGrpSpPr>
+        <p:cNvPr id="1" name=""/>
+        <p:cNvGrpSpPr/>
+        <p:nvPr/>
+      </p:nvGrpSpPr>
+      <p:grpSpPr/>
+      <p:sp>
+        <p:nvSpPr>
+          <p:cNvPr id="2" name="TextBox 1"/>
+          <p:cNvSpPr txBox="1"/>
+          <p:nvPr/>
+        </p:nvSpPr>
+        <p:spPr>
+          <a:xfrm>
+            <a:off x="822960" y="502920"/>
+            <a:ext cx="10515600" cy="822960"/>
+          </a:xfrm>
+          <a:prstGeom prst="rect">
+            <a:avLst/>
+          </a:prstGeom>
+          <a:noFill/>
+        </p:spPr>
+        <p:txBody>
+          <a:bodyPr wrap="square" anchor="t" lIns="0" rIns="0" tIns="0" bIns="0">
+            <a:spAutoFit/>
+          </a:bodyPr>
+          <a:lstStyle/>
+          <a:p>
+            <a:pPr algn="l">
+              <a:lnSpc>
+                <a:spcPct val="110000"/>
+              </a:lnSpc>
+              <a:spcBef>
+                <a:spcPts val="0"/>
+              </a:spcBef>
+            </a:pPr>
+            <a:r>
+              <a:rPr sz="2800" b="1">
+                <a:solidFill>
+                  <a:srgbClr val="10233A"/>
+                </a:solidFill>
+                <a:latin typeface="Helvetica Neue"/>
+              </a:rPr>
+              <a:t>Dataset</a:t>
+            </a:r>
+          </a:p>
+        </p:txBody>
+      </p:sp>
+      <p:sp>
+        <p:nvSpPr>
+          <p:cNvPr id="3" name="Rectangle 2"/>
+          <p:cNvSpPr/>
+          <p:nvPr/>
+        </p:nvSpPr>
+        <p:spPr>
+          <a:xfrm>
+            <a:off x="822960" y="1298448"/>
+            <a:ext cx="10515600" cy="18288"/>
+          </a:xfrm>
+          <a:prstGeom prst="rect">
+            <a:avLst/>
+          </a:prstGeom>
+          <a:solidFill>
+            <a:srgbClr val="DDE2E8"/>
+          </a:solidFill>
+          <a:ln>
+            <a:noFill/>
+          </a:ln>
+        </p:spPr>
+        <p:style>
+          <a:lnRef idx="1">
+            <a:schemeClr val="accent1"/>
+          </a:lnRef>
+          <a:fillRef idx="3">
+            <a:schemeClr val="accent1"/>
+          </a:fillRef>
+          <a:effectRef idx="2">
+            <a:schemeClr val="accent1"/>
+          </a:effectRef>
+          <a:fontRef idx="minor">
+            <a:schemeClr val="lt1"/>
+          </a:fontRef>
+        </p:style>
+        <p:txBody>
+          <a:bodyPr rtlCol="0" anchor="ctr"/>
+          <a:lstStyle/>
+          <a:p>
+            <a:pPr algn="ctr"/>
+          </a:p>
+        </p:txBody>
+      </p:sp>
+      <p:sp>
+        <p:nvSpPr>
+          <p:cNvPr id="4" name="TextBox 3"/>
+          <p:cNvSpPr txBox="1"/>
+          <p:nvPr/>
+        </p:nvSpPr>
+        <p:spPr>
+          <a:xfrm>
+            <a:off x="868680" y="1600200"/>
+            <a:ext cx="4754880" cy="3840480"/>
+          </a:xfrm>
+          <a:prstGeom prst="rect">
+            <a:avLst/>
+          </a:prstGeom>
+          <a:noFill/>
+        </p:spPr>
+        <p:txBody>
+          <a:bodyPr wrap="square" anchor="t" lIns="0" rIns="0" tIns="0" bIns="0">
+            <a:spAutoFit/>
+          </a:bodyPr>
+          <a:lstStyle/>
+          <a:p>
+            <a:pPr>
+              <a:lnSpc>
+                <a:spcPct val="125000"/>
+              </a:lnSpc>
+              <a:spcBef>
+                <a:spcPts val="0"/>
+              </a:spcBef>
+            </a:pPr>
+            <a:r>
+              <a:rPr sz="1500" b="1">
+                <a:solidFill>
+                  <a:srgbClr val="C08A2E"/>
+                </a:solidFill>
+                <a:latin typeface="Helvetica Neue"/>
+              </a:rPr>
+              <a:t>-  </a:t>
+            </a:r>
+            <a:r>
+              <a:rPr sz="1500">
+                <a:solidFill>
+                  <a:srgbClr val="10233A"/>
+                </a:solidFill>
+                <a:latin typeface="Helvetica Neue"/>
+              </a:rPr>
+              <a:t>We have curated 10,448 presentations from this source and made them publicly available to ...</a:t>
+            </a:r>
+          </a:p>
+          <a:p>
+            <a:pPr>
+              <a:lnSpc>
+                <a:spcPct val="125000"/>
+              </a:lnSpc>
+              <a:spcBef>
+                <a:spcPts val="1200"/>
+              </a:spcBef>
+            </a:pPr>
+            <a:r>
+              <a:rPr sz="1500" b="1">
+                <a:solidFill>
+                  <a:srgbClr val="C08A2E"/>
+                </a:solidFill>
+                <a:latin typeface="Helvetica Neue"/>
+              </a:rPr>
+              <a:t>-  </a:t>
+            </a:r>
+            <a:r>
+              <a:rPr sz="1500">
+                <a:solidFill>
+                  <a:srgbClr val="10233A"/>
+                </a:solidFill>
+                <a:latin typeface="Helvetica Neue"/>
+              </a:rPr>
+              <a:t>The sampling criteria and preprocessing details are provided in Appendix A, while the dataset ...</a:t>
+            </a:r>
+          </a:p>
+          <a:p>
+            <a:pPr>
+              <a:lnSpc>
+                <a:spcPct val="125000"/>
+              </a:lnSpc>
+              <a:spcBef>
+                <a:spcPts val="1200"/>
+              </a:spcBef>
+            </a:pPr>
+            <a:r>
+              <a:rPr sz="1500" b="1">
+                <a:solidFill>
+                  <a:srgbClr val="C08A2E"/>
+                </a:solidFill>
+                <a:latin typeface="Helvetica Neue"/>
+              </a:rPr>
+              <a:t>-  </a:t>
+            </a:r>
+            <a:r>
+              <a:rPr sz="1500">
+                <a:solidFill>
+                  <a:srgbClr val="10233A"/>
+                </a:solidFill>
+                <a:latin typeface="Helvetica Neue"/>
+              </a:rPr>
+              <a:t>In addition, we collected 50 documents from the same domains to be used as ...</a:t>
+            </a:r>
+          </a:p>
+          <a:p>
+            <a:pPr>
+              <a:lnSpc>
+                <a:spcPct val="125000"/>
+              </a:lnSpc>
+              <a:spcBef>
+                <a:spcPts val="1200"/>
+              </a:spcBef>
+            </a:pPr>
+            <a:r>
+              <a:rPr sz="1500" b="1">
+                <a:solidFill>
+                  <a:srgbClr val="C08A2E"/>
+                </a:solidFill>
+                <a:latin typeface="Helvetica Neue"/>
+              </a:rPr>
+              <a:t>-  </a:t>
+            </a:r>
+            <a:r>
+              <a:rPr sz="1500">
+                <a:solidFill>
+                  <a:srgbClr val="10233A"/>
+                </a:solidFill>
+                <a:latin typeface="Helvetica Neue"/>
+              </a:rPr>
+              <a:t>Additionally, these datasets primarily consist of academic presentations in artificial intelligence, limiting their diversity</a:t>
+            </a:r>
+          </a:p>
+          <a:p>
+            <a:pPr>
+              <a:lnSpc>
+                <a:spcPct val="125000"/>
+              </a:lnSpc>
+              <a:spcBef>
+                <a:spcPts val="1200"/>
+              </a:spcBef>
+            </a:pPr>
+            <a:r>
+              <a:rPr sz="1500" b="1">
+                <a:solidFill>
+                  <a:srgbClr val="C08A2E"/>
+                </a:solidFill>
+                <a:latin typeface="Helvetica Neue"/>
+              </a:rPr>
+              <a:t>-  </a:t>
+            </a:r>
+            <a:r>
+              <a:rPr sz="1500">
+                <a:solidFill>
+                  <a:srgbClr val="10233A"/>
+                </a:solidFill>
+                <a:latin typeface="Helvetica Neue"/>
+              </a:rPr>
+              <a:t>Existing presentation datasets, such as Fu et al</a:t>
+            </a:r>
+          </a:p>
+          <a:p>
+            <a:pPr>
+              <a:lnSpc>
+                <a:spcPct val="125000"/>
+              </a:lnSpc>
+              <a:spcBef>
+                <a:spcPts val="1200"/>
+              </a:spcBef>
+            </a:pPr>
+            <a:r>
+              <a:rPr sz="1500" b="1">
+                <a:solidFill>
+                  <a:srgbClr val="C08A2E"/>
+                </a:solidFill>
+                <a:latin typeface="Helvetica Neue"/>
+              </a:rPr>
+              <a:t>-  </a:t>
+            </a:r>
+            <a:r>
+              <a:rPr sz="1500">
+                <a:solidFill>
+                  <a:srgbClr val="10233A"/>
+                </a:solidFill>
+                <a:latin typeface="Helvetica Neue"/>
+              </a:rPr>
+              <a:t>To address these limitations, we introduce Zenodo10K, a new dataset sourced from Zenodo  ...</a:t>
             </a:r>
           </a:p>
         </p:txBody>
@@ -5309,8 +5645,8 @@
         </p:blipFill>
         <p:spPr>
           <a:xfrm>
-            <a:off x="5897880" y="2036123"/>
-            <a:ext cx="5486399" cy="2822330"/>
+            <a:off x="5897880" y="2031726"/>
+            <a:ext cx="5486399" cy="2831123"/>
           </a:xfrm>
           <a:prstGeom prst="rect">
             <a:avLst/>
@@ -5439,7 +5775,7 @@
                 </a:solidFill>
                 <a:latin typeface="Helvetica Neue"/>
               </a:rPr>
-              <a:t>04</a:t>
+              <a:t>05</a:t>
             </a:r>
           </a:p>
         </p:txBody>
@@ -5452,7 +5788,7 @@
 </p:sld>
 </file>
 
-<file path=ppt/slides/slide5.xml><?xml version="1.0" encoding="utf-8"?>
+<file path=ppt/slides/slide6.xml><?xml version="1.0" encoding="utf-8"?>
 <p:sld xmlns:a="http://schemas.openxmlformats.org/drawingml/2006/main" xmlns:p="http://schemas.openxmlformats.org/presentationml/2006/main" xmlns:r="http://schemas.openxmlformats.org/officeDocument/2006/relationships">
   <p:cSld>
     <p:spTree>
@@ -5499,7 +5835,7 @@
                 </a:solidFill>
                 <a:latin typeface="Helvetica Neue"/>
               </a:rPr>
-              <a:t>Experiment</a:t>
+              <a:t>Implementation Details</a:t>
             </a:r>
           </a:p>
         </p:txBody>
@@ -5578,7 +5914,7 @@
               </a:spcBef>
             </a:pPr>
             <a:r>
-              <a:rPr sz="1700" b="1">
+              <a:rPr sz="1500" b="1">
                 <a:solidFill>
                   <a:srgbClr val="C08A2E"/>
                 </a:solidFill>
@@ -5587,13 +5923,13 @@
               <a:t>-  </a:t>
             </a:r>
             <a:r>
-              <a:rPr sz="1700">
+              <a:rPr sz="1500">
                 <a:solidFill>
                   <a:srgbClr val="10233A"/>
                 </a:solidFill>
                 <a:latin typeface="Helvetica Neue"/>
               </a:rPr>
-              <a:t>All open-source LLMs are deployed using the VLLM framework on NVIDIA A100 GPUs</a:t>
+              <a:t>PPTAGENT is implemented with three models: GPT-4o-2024-08-06 (GPT-4o), Qwen2.5-72B- Instruct , and Qwen2- VL-72B-Instruct</a:t>
             </a:r>
           </a:p>
           <a:p>
@@ -5606,7 +5942,7 @@
               </a:spcBef>
             </a:pPr>
             <a:r>
-              <a:rPr sz="1700" b="1">
+              <a:rPr sz="1500" b="1">
                 <a:solidFill>
                   <a:srgbClr val="C08A2E"/>
                 </a:solidFill>
@@ -5615,13 +5951,13 @@
               <a:t>-  </a:t>
             </a:r>
             <a:r>
-              <a:rPr sz="1700">
+              <a:rPr sz="1500">
                 <a:solidFill>
                   <a:srgbClr val="10233A"/>
                 </a:solidFill>
                 <a:latin typeface="Helvetica Neue"/>
               </a:rPr>
-              <a:t>Each configuration generates 50 presentations (5 domains × 10 input documents), as they do ...</a:t>
+              <a:t>All open-source LLMs are deployed using the VLLM framework on NVIDIA A100 GPUs</a:t>
             </a:r>
           </a:p>
           <a:p>
@@ -5634,7 +5970,7 @@
               </a:spcBef>
             </a:pPr>
             <a:r>
-              <a:rPr sz="1700" b="1">
+              <a:rPr sz="1500" b="1">
                 <a:solidFill>
                   <a:srgbClr val="C08A2E"/>
                 </a:solidFill>
@@ -5643,13 +5979,13 @@
               <a:t>-  </a:t>
             </a:r>
             <a:r>
-              <a:rPr sz="1700">
+              <a:rPr sz="1500">
                 <a:solidFill>
                   <a:srgbClr val="10233A"/>
                 </a:solidFill>
                 <a:latin typeface="Helvetica Neue"/>
               </a:rPr>
-              <a:t>Specifically, we define configurations as combinations of a language model (LM) and a vision ...</a:t>
+              <a:t>Each configuration generates 50 presentations (5 domains × 10 input documents), as they do ...</a:t>
             </a:r>
           </a:p>
           <a:p>
@@ -5662,7 +5998,7 @@
               </a:spcBef>
             </a:pPr>
             <a:r>
-              <a:rPr sz="1700" b="1">
+              <a:rPr sz="1500" b="1">
                 <a:solidFill>
                   <a:srgbClr val="C08A2E"/>
                 </a:solidFill>
@@ -5671,13 +6007,13 @@
               <a:t>-  </a:t>
             </a:r>
             <a:r>
-              <a:rPr sz="1700">
+              <a:rPr sz="1500">
                 <a:solidFill>
                   <a:srgbClr val="10233A"/>
                 </a:solidFill>
                 <a:latin typeface="Helvetica Neue"/>
               </a:rPr>
-              <a:t>We have curated 10,448 presentations from this source and made them publicly available to ...</a:t>
+              <a:t>Specifically, we define configurations as combinations of a language model (LM) and a vision ...</a:t>
             </a:r>
           </a:p>
           <a:p>
@@ -5690,7 +6026,7 @@
               </a:spcBef>
             </a:pPr>
             <a:r>
-              <a:rPr sz="1700" b="1">
+              <a:rPr sz="1500" b="1">
                 <a:solidFill>
                   <a:srgbClr val="C08A2E"/>
                 </a:solidFill>
@@ -5699,7 +6035,7 @@
               <a:t>-  </a:t>
             </a:r>
             <a:r>
-              <a:rPr sz="1700">
+              <a:rPr sz="1500">
                 <a:solidFill>
                   <a:srgbClr val="10233A"/>
                 </a:solidFill>
@@ -5718,7 +6054,7 @@
               </a:spcBef>
             </a:pPr>
             <a:r>
-              <a:rPr sz="1700" b="1">
+              <a:rPr sz="1500" b="1">
                 <a:solidFill>
                   <a:srgbClr val="C08A2E"/>
                 </a:solidFill>
@@ -5727,13 +6063,13 @@
               <a:t>-  </a:t>
             </a:r>
             <a:r>
-              <a:rPr sz="1700">
+              <a:rPr sz="1500">
                 <a:solidFill>
                   <a:srgbClr val="10233A"/>
                 </a:solidFill>
                 <a:latin typeface="Helvetica Neue"/>
               </a:rPr>
-              <a:t>In addition, we collected 50 documents from the same domains to be used as ...</a:t>
+              <a:t>Each slide generation allows a maximum of two self-correction iterations</a:t>
             </a:r>
           </a:p>
         </p:txBody>
@@ -5775,7 +6111,7 @@
                 </a:solidFill>
                 <a:latin typeface="Helvetica Neue"/>
               </a:rPr>
-              <a:t>05</a:t>
+              <a:t>06</a:t>
             </a:r>
           </a:p>
         </p:txBody>
@@ -5788,7 +6124,7 @@
 </p:sld>
 </file>
 
-<file path=ppt/slides/slide6.xml><?xml version="1.0" encoding="utf-8"?>
+<file path=ppt/slides/slide7.xml><?xml version="1.0" encoding="utf-8"?>
 <p:sld xmlns:a="http://schemas.openxmlformats.org/drawingml/2006/main" xmlns:p="http://schemas.openxmlformats.org/presentationml/2006/main" xmlns:r="http://schemas.openxmlformats.org/officeDocument/2006/relationships">
   <p:cSld>
     <p:spTree>
@@ -6111,7 +6447,7 @@
                 </a:solidFill>
                 <a:latin typeface="Helvetica Neue"/>
               </a:rPr>
-              <a:t>06</a:t>
+              <a:t>07</a:t>
             </a:r>
           </a:p>
         </p:txBody>
@@ -6124,7 +6460,7 @@
 </p:sld>
 </file>
 
-<file path=ppt/slides/slide7.xml><?xml version="1.0" encoding="utf-8"?>
+<file path=ppt/slides/slide8.xml><?xml version="1.0" encoding="utf-8"?>
 <p:sld xmlns:a="http://schemas.openxmlformats.org/drawingml/2006/main" xmlns:p="http://schemas.openxmlformats.org/presentationml/2006/main" xmlns:r="http://schemas.openxmlformats.org/officeDocument/2006/relationships">
   <p:cSld>
     <p:spTree>
@@ -6250,7 +6586,7 @@
               </a:spcBef>
             </a:pPr>
             <a:r>
-              <a:rPr sz="1500" b="1">
+              <a:rPr sz="1700" b="1">
                 <a:solidFill>
                   <a:srgbClr val="C08A2E"/>
                 </a:solidFill>
@@ -6259,13 +6595,13 @@
               <a:t>-  </a:t>
             </a:r>
             <a:r>
-              <a:rPr sz="1500">
+              <a:rPr sz="1700">
                 <a:solidFill>
                   <a:srgbClr val="10233A"/>
                 </a:solidFill>
                 <a:latin typeface="Helvetica Neue"/>
               </a:rPr>
-              <a:t>PPTAgent (a) DocPres KCTV PPTAgent (b) Figure 5: Comparative analysis of presentation generation across ...</a:t>
+              <a:t>Table 5 shows the correlation of ratings between humans and LLMs</a:t>
             </a:r>
           </a:p>
           <a:p>
@@ -6278,7 +6614,7 @@
               </a:spcBef>
             </a:pPr>
             <a:r>
-              <a:rPr sz="1500" b="1">
+              <a:rPr sz="1700" b="1">
                 <a:solidFill>
                   <a:srgbClr val="C08A2E"/>
                 </a:solidFill>
@@ -6287,13 +6623,13 @@
               <a:t>-  </a:t>
             </a:r>
             <a:r>
-              <a:rPr sz="1500">
+              <a:rPr sz="1700">
                 <a:solidFill>
                   <a:srgbClr val="10233A"/>
                 </a:solidFill>
                 <a:latin typeface="Helvetica Neue"/>
               </a:rPr>
-              <a:t>Although GPT-4o exhibits superior self-correction capabilities compared to Qwen2.5, Qwen2.5 encounters fewer errors in ...</a:t>
+              <a:t>Pearson 0.70 0.90 0.55 0.71 Spearman 0.73 0.88 0.57 0.74 tions, leading to outputs ...</a:t>
             </a:r>
           </a:p>
           <a:p>
@@ -6306,7 +6642,7 @@
               </a:spcBef>
             </a:pPr>
             <a:r>
-              <a:rPr sz="1500" b="1">
+              <a:rPr sz="1700" b="1">
                 <a:solidFill>
                   <a:srgbClr val="C08A2E"/>
                 </a:solidFill>
@@ -6315,13 +6651,13 @@
               <a:t>-  </a:t>
             </a:r>
             <a:r>
-              <a:rPr sz="1500">
+              <a:rPr sz="1700">
                 <a:solidFill>
                   <a:srgbClr val="10233A"/>
                 </a:solidFill>
                 <a:latin typeface="Helvetica Neue"/>
               </a:rPr>
-              <a:t>Table 5 shows the correlation of ratings between humans and LLMs</a:t>
+              <a:t>All experiments were conducted using the Qwen2.5LM+Qwen2-VLVM configuration</a:t>
             </a:r>
           </a:p>
           <a:p>
@@ -6334,7 +6670,7 @@
               </a:spcBef>
             </a:pPr>
             <a:r>
-              <a:rPr sz="1500" b="1">
+              <a:rPr sz="1700" b="1">
                 <a:solidFill>
                   <a:srgbClr val="C08A2E"/>
                 </a:solidFill>
@@ -6343,13 +6679,13 @@
               <a:t>-  </a:t>
             </a:r>
             <a:r>
-              <a:rPr sz="1500">
+              <a:rPr sz="1700">
                 <a:solidFill>
                   <a:srgbClr val="10233A"/>
                 </a:solidFill>
                 <a:latin typeface="Helvetica Neue"/>
               </a:rPr>
-              <a:t>All presented data of similarity exhibit a p-value below 0.05, indicating a statistically significant ...</a:t>
+              <a:t>The average Pearson correlation of 0.71 exceeds the scores of other evaluation methods  ...</a:t>
             </a:r>
           </a:p>
           <a:p>
@@ -6362,7 +6698,7 @@
               </a:spcBef>
             </a:pPr>
             <a:r>
-              <a:rPr sz="1500" b="1">
+              <a:rPr sz="1700" b="1">
                 <a:solidFill>
                   <a:srgbClr val="C08A2E"/>
                 </a:solidFill>
@@ -6371,13 +6707,13 @@
               <a:t>-  </a:t>
             </a:r>
             <a:r>
-              <a:rPr sz="1500">
+              <a:rPr sz="1700">
                 <a:solidFill>
                   <a:srgbClr val="10233A"/>
                 </a:solidFill>
                 <a:latin typeface="Helvetica Neue"/>
               </a:rPr>
-              <a:t>All experiments were conducted using the Qwen2.5LM+Qwen2-VLVM configuration</a:t>
+              <a:t>However, their dependence on extensive manual effort for template annotation significantly limits scalability and ...</a:t>
             </a:r>
           </a:p>
           <a:p>
@@ -6390,7 +6726,7 @@
               </a:spcBef>
             </a:pPr>
             <a:r>
-              <a:rPr sz="1500" b="1">
+              <a:rPr sz="1700" b="1">
                 <a:solidFill>
                   <a:srgbClr val="C08A2E"/>
                 </a:solidFill>
@@ -6399,13 +6735,13 @@
               <a:t>-  </a:t>
             </a:r>
             <a:r>
-              <a:rPr sz="1500">
+              <a:rPr sz="1700">
                 <a:solidFill>
                   <a:srgbClr val="10233A"/>
                 </a:solidFill>
                 <a:latin typeface="Helvetica Neue"/>
               </a:rPr>
-              <a:t>Additionally, we observed that Qwen2-VL experiences errors more frequently and has poorer self-correction capabilities ...</a:t>
+              <a:t>However, they did not evaluate presentation quality from a holistic perspective</a:t>
             </a:r>
           </a:p>
         </p:txBody>
@@ -6447,7 +6783,7 @@
                 </a:solidFill>
                 <a:latin typeface="Helvetica Neue"/>
               </a:rPr>
-              <a:t>07</a:t>
+              <a:t>08</a:t>
             </a:r>
           </a:p>
         </p:txBody>
@@ -6460,7 +6796,7 @@
 </p:sld>
 </file>
 
-<file path=ppt/slides/slide8.xml><?xml version="1.0" encoding="utf-8"?>
+<file path=ppt/slides/slide9.xml><?xml version="1.0" encoding="utf-8"?>
 <p:sld xmlns:a="http://schemas.openxmlformats.org/drawingml/2006/main" xmlns:p="http://schemas.openxmlformats.org/presentationml/2006/main" xmlns:r="http://schemas.openxmlformats.org/officeDocument/2006/relationships">
   <p:cSld>
     <p:spTree>
@@ -6686,342 +7022,6 @@
                 <a:latin typeface="Helvetica Neue"/>
               </a:rPr>
               <a:t>In this paper, we introduce PPTAGENT, which conceptualizes presentation generation as a two-stage presentation ...</a:t>
-            </a:r>
-          </a:p>
-        </p:txBody>
-      </p:sp>
-      <p:sp>
-        <p:nvSpPr>
-          <p:cNvPr id="5" name="TextBox 4"/>
-          <p:cNvSpPr txBox="1"/>
-          <p:nvPr/>
-        </p:nvSpPr>
-        <p:spPr>
-          <a:xfrm>
-            <a:off x="10881360" y="6446520"/>
-            <a:ext cx="548640" cy="274320"/>
-          </a:xfrm>
-          <a:prstGeom prst="rect">
-            <a:avLst/>
-          </a:prstGeom>
-          <a:noFill/>
-        </p:spPr>
-        <p:txBody>
-          <a:bodyPr wrap="square" anchor="t" lIns="0" rIns="0" tIns="0" bIns="0">
-            <a:spAutoFit/>
-          </a:bodyPr>
-          <a:lstStyle/>
-          <a:p>
-            <a:pPr algn="r">
-              <a:lnSpc>
-                <a:spcPct val="120000"/>
-              </a:lnSpc>
-              <a:spcBef>
-                <a:spcPts val="0"/>
-              </a:spcBef>
-            </a:pPr>
-            <a:r>
-              <a:rPr sz="900" b="0">
-                <a:solidFill>
-                  <a:srgbClr val="5A6B7C"/>
-                </a:solidFill>
-                <a:latin typeface="Helvetica Neue"/>
-              </a:rPr>
-              <a:t>08</a:t>
-            </a:r>
-          </a:p>
-        </p:txBody>
-      </p:sp>
-    </p:spTree>
-  </p:cSld>
-  <p:clrMapOvr>
-    <a:masterClrMapping/>
-  </p:clrMapOvr>
-</p:sld>
-</file>
-
-<file path=ppt/slides/slide9.xml><?xml version="1.0" encoding="utf-8"?>
-<p:sld xmlns:a="http://schemas.openxmlformats.org/drawingml/2006/main" xmlns:p="http://schemas.openxmlformats.org/presentationml/2006/main" xmlns:r="http://schemas.openxmlformats.org/officeDocument/2006/relationships">
-  <p:cSld>
-    <p:spTree>
-      <p:nvGrpSpPr>
-        <p:cNvPr id="1" name=""/>
-        <p:cNvGrpSpPr/>
-        <p:nvPr/>
-      </p:nvGrpSpPr>
-      <p:grpSpPr/>
-      <p:sp>
-        <p:nvSpPr>
-          <p:cNvPr id="2" name="TextBox 1"/>
-          <p:cNvSpPr txBox="1"/>
-          <p:nvPr/>
-        </p:nvSpPr>
-        <p:spPr>
-          <a:xfrm>
-            <a:off x="822960" y="502920"/>
-            <a:ext cx="10515600" cy="822960"/>
-          </a:xfrm>
-          <a:prstGeom prst="rect">
-            <a:avLst/>
-          </a:prstGeom>
-          <a:noFill/>
-        </p:spPr>
-        <p:txBody>
-          <a:bodyPr wrap="square" anchor="t" lIns="0" rIns="0" tIns="0" bIns="0">
-            <a:spAutoFit/>
-          </a:bodyPr>
-          <a:lstStyle/>
-          <a:p>
-            <a:pPr algn="l">
-              <a:lnSpc>
-                <a:spcPct val="110000"/>
-              </a:lnSpc>
-              <a:spcBef>
-                <a:spcPts val="0"/>
-              </a:spcBef>
-            </a:pPr>
-            <a:r>
-              <a:rPr sz="2800" b="1">
-                <a:solidFill>
-                  <a:srgbClr val="10233A"/>
-                </a:solidFill>
-                <a:latin typeface="Helvetica Neue"/>
-              </a:rPr>
-              <a:t>Limitations</a:t>
-            </a:r>
-          </a:p>
-        </p:txBody>
-      </p:sp>
-      <p:sp>
-        <p:nvSpPr>
-          <p:cNvPr id="3" name="Rectangle 2"/>
-          <p:cNvSpPr/>
-          <p:nvPr/>
-        </p:nvSpPr>
-        <p:spPr>
-          <a:xfrm>
-            <a:off x="822960" y="1298448"/>
-            <a:ext cx="10515600" cy="18288"/>
-          </a:xfrm>
-          <a:prstGeom prst="rect">
-            <a:avLst/>
-          </a:prstGeom>
-          <a:solidFill>
-            <a:srgbClr val="DDE2E8"/>
-          </a:solidFill>
-          <a:ln>
-            <a:noFill/>
-          </a:ln>
-        </p:spPr>
-        <p:style>
-          <a:lnRef idx="1">
-            <a:schemeClr val="accent1"/>
-          </a:lnRef>
-          <a:fillRef idx="3">
-            <a:schemeClr val="accent1"/>
-          </a:fillRef>
-          <a:effectRef idx="2">
-            <a:schemeClr val="accent1"/>
-          </a:effectRef>
-          <a:fontRef idx="minor">
-            <a:schemeClr val="lt1"/>
-          </a:fontRef>
-        </p:style>
-        <p:txBody>
-          <a:bodyPr rtlCol="0" anchor="ctr"/>
-          <a:lstStyle/>
-          <a:p>
-            <a:pPr algn="ctr"/>
-          </a:p>
-        </p:txBody>
-      </p:sp>
-      <p:sp>
-        <p:nvSpPr>
-          <p:cNvPr id="4" name="TextBox 3"/>
-          <p:cNvSpPr txBox="1"/>
-          <p:nvPr/>
-        </p:nvSpPr>
-        <p:spPr>
-          <a:xfrm>
-            <a:off x="868680" y="1600200"/>
-            <a:ext cx="10424160" cy="4114800"/>
-          </a:xfrm>
-          <a:prstGeom prst="rect">
-            <a:avLst/>
-          </a:prstGeom>
-          <a:noFill/>
-        </p:spPr>
-        <p:txBody>
-          <a:bodyPr wrap="square" anchor="t" lIns="0" rIns="0" tIns="0" bIns="0">
-            <a:spAutoFit/>
-          </a:bodyPr>
-          <a:lstStyle/>
-          <a:p>
-            <a:pPr>
-              <a:lnSpc>
-                <a:spcPct val="125000"/>
-              </a:lnSpc>
-              <a:spcBef>
-                <a:spcPts val="0"/>
-              </a:spcBef>
-            </a:pPr>
-            <a:r>
-              <a:rPr sz="1500" b="1">
-                <a:solidFill>
-                  <a:srgbClr val="C08A2E"/>
-                </a:solidFill>
-                <a:latin typeface="Helvetica Neue"/>
-              </a:rPr>
-              <a:t>-  </a:t>
-            </a:r>
-            <a:r>
-              <a:rPr sz="1500">
-                <a:solidFill>
-                  <a:srgbClr val="10233A"/>
-                </a:solidFill>
-                <a:latin typeface="Helvetica Neue"/>
-              </a:rPr>
-              <a:t>While PPTAGENT demonstrates promising capabilities in presentation generation, several limitations remain</a:t>
-            </a:r>
-          </a:p>
-          <a:p>
-            <a:pPr>
-              <a:lnSpc>
-                <a:spcPct val="125000"/>
-              </a:lnSpc>
-              <a:spcBef>
-                <a:spcPts val="1200"/>
-              </a:spcBef>
-            </a:pPr>
-            <a:r>
-              <a:rPr sz="1500" b="1">
-                <a:solidFill>
-                  <a:srgbClr val="C08A2E"/>
-                </a:solidFill>
-                <a:latin typeface="Helvetica Neue"/>
-              </a:rPr>
-              <a:t>-  </a:t>
-            </a:r>
-            <a:r>
-              <a:rPr sz="1500">
-                <a:solidFill>
-                  <a:srgbClr val="10233A"/>
-                </a:solidFill>
-                <a:latin typeface="Helvetica Neue"/>
-              </a:rPr>
-              <a:t>First, despite achieving a high success rate (&gt;95%) on our dataset, the model occasionally ...</a:t>
-            </a:r>
-          </a:p>
-          <a:p>
-            <a:pPr>
-              <a:lnSpc>
-                <a:spcPct val="125000"/>
-              </a:lnSpc>
-              <a:spcBef>
-                <a:spcPts val="1200"/>
-              </a:spcBef>
-            </a:pPr>
-            <a:r>
-              <a:rPr sz="1500" b="1">
-                <a:solidFill>
-                  <a:srgbClr val="C08A2E"/>
-                </a:solidFill>
-                <a:latin typeface="Helvetica Neue"/>
-              </a:rPr>
-              <a:t>-  </a:t>
-            </a:r>
-            <a:r>
-              <a:rPr sz="1500">
-                <a:solidFill>
-                  <a:srgbClr val="10233A"/>
-                </a:solidFill>
-                <a:latin typeface="Helvetica Neue"/>
-              </a:rPr>
-              <a:t>This manifests in occasional design flaws, such as overlapping elements, which can compromise the ...</a:t>
-            </a:r>
-          </a:p>
-          <a:p>
-            <a:pPr>
-              <a:lnSpc>
-                <a:spcPct val="125000"/>
-              </a:lnSpc>
-              <a:spcBef>
-                <a:spcPts val="1200"/>
-              </a:spcBef>
-            </a:pPr>
-            <a:r>
-              <a:rPr sz="1500" b="1">
-                <a:solidFill>
-                  <a:srgbClr val="C08A2E"/>
-                </a:solidFill>
-                <a:latin typeface="Helvetica Neue"/>
-              </a:rPr>
-              <a:t>-  </a:t>
-            </a:r>
-            <a:r>
-              <a:rPr sz="1500">
-                <a:solidFill>
-                  <a:srgbClr val="10233A"/>
-                </a:solidFill>
-                <a:latin typeface="Helvetica Neue"/>
-              </a:rPr>
-              <a:t>Ethical Considerations In the construction of Zenodo10K, we utilized the publicly available API to ...</a:t>
-            </a:r>
-          </a:p>
-          <a:p>
-            <a:pPr>
-              <a:lnSpc>
-                <a:spcPct val="125000"/>
-              </a:lnSpc>
-              <a:spcBef>
-                <a:spcPts val="1200"/>
-              </a:spcBef>
-            </a:pPr>
-            <a:r>
-              <a:rPr sz="1500" b="1">
-                <a:solidFill>
-                  <a:srgbClr val="C08A2E"/>
-                </a:solidFill>
-                <a:latin typeface="Helvetica Neue"/>
-              </a:rPr>
-              <a:t>-  </a:t>
-            </a:r>
-            <a:r>
-              <a:rPr sz="1500">
-                <a:solidFill>
-                  <a:srgbClr val="10233A"/>
-                </a:solidFill>
-                <a:latin typeface="Helvetica Neue"/>
-              </a:rPr>
-              <a:t>Future work should focus on enhancing the robustness, reducing reference dependency, and better incorporating ...</a:t>
-            </a:r>
-          </a:p>
-          <a:p>
-            <a:pPr>
-              <a:lnSpc>
-                <a:spcPct val="125000"/>
-              </a:lnSpc>
-              <a:spcBef>
-                <a:spcPts val="1200"/>
-              </a:spcBef>
-            </a:pPr>
-            <a:r>
-              <a:rPr sz="1500" b="1">
-                <a:solidFill>
-                  <a:srgbClr val="C08A2E"/>
-                </a:solidFill>
-                <a:latin typeface="Helvetica Neue"/>
-              </a:rPr>
-              <a:t>-  </a:t>
-            </a:r>
-            <a:r>
-              <a:rPr sz="1500">
-                <a:solidFill>
-                  <a:srgbClr val="10233A"/>
-                </a:solidFill>
-                <a:latin typeface="Helvetica Neue"/>
-              </a:rPr>
-              <a:t>Third, although PPTAGENT shows improvements in layout optimization compared to prior approaches, it does ...</a:t>
             </a:r>
           </a:p>
         </p:txBody>
